--- a/вкр/презентация-по_ВКР_Демьянцев_Виталий_Владиславович_606_22.pptx
+++ b/вкр/презентация-по_ВКР_Демьянцев_Виталий_Владиславович_606_22.pptx
@@ -1,6 +1,6 @@
 
 <file path=ppt/presentation.xml><?xml version="1.0" encoding="utf-8"?>
-<p:presentation xmlns:a="http://schemas.openxmlformats.org/drawingml/2006/main" xmlns:r="http://schemas.openxmlformats.org/officeDocument/2006/relationships" xmlns:p="http://schemas.openxmlformats.org/presentationml/2006/main" removePersonalInfoOnSave="1" saveSubsetFonts="1" autoCompressPictures="0">
+<p:presentation xmlns:a="http://schemas.openxmlformats.org/drawingml/2006/main" xmlns:r="http://schemas.openxmlformats.org/officeDocument/2006/relationships" xmlns:p="http://schemas.openxmlformats.org/presentationml/2006/main" firstSlideNum="0" showSpecialPlsOnTitleSld="0" removePersonalInfoOnSave="1" saveSubsetFonts="1" autoCompressPictures="0">
   <p:sldMasterIdLst>
     <p:sldMasterId id="2147483648" r:id="rId1"/>
   </p:sldMasterIdLst>
@@ -572,7 +572,7 @@
                 <a:latin typeface="Aptos" pitchFamily="34" charset="0"/>
               </a:rPr>
               <a:pPr eaLnBrk="1" hangingPunct="1"/>
-              <a:t>1</a:t>
+              <a:t>0</a:t>
             </a:fld>
             <a:endParaRPr lang="en-US" altLang="ru-RU">
               <a:latin typeface="Aptos" pitchFamily="34" charset="0"/>
@@ -845,7 +845,7 @@
                 <a:latin typeface="Aptos" pitchFamily="34" charset="0"/>
               </a:rPr>
               <a:pPr eaLnBrk="1" hangingPunct="1"/>
-              <a:t>10</a:t>
+              <a:t>9</a:t>
             </a:fld>
             <a:endParaRPr lang="en-US" altLang="ru-RU">
               <a:latin typeface="Aptos" pitchFamily="34" charset="0"/>
@@ -1118,7 +1118,7 @@
                 <a:latin typeface="Aptos" pitchFamily="34" charset="0"/>
               </a:rPr>
               <a:pPr eaLnBrk="1" hangingPunct="1"/>
-              <a:t>11</a:t>
+              <a:t>10</a:t>
             </a:fld>
             <a:endParaRPr lang="en-US" altLang="ru-RU">
               <a:latin typeface="Aptos" pitchFamily="34" charset="0"/>
@@ -1391,7 +1391,7 @@
                 <a:latin typeface="Aptos" pitchFamily="34" charset="0"/>
               </a:rPr>
               <a:pPr eaLnBrk="1" hangingPunct="1"/>
-              <a:t>12</a:t>
+              <a:t>11</a:t>
             </a:fld>
             <a:endParaRPr lang="en-US" altLang="ru-RU">
               <a:latin typeface="Aptos" pitchFamily="34" charset="0"/>
@@ -1664,7 +1664,7 @@
                 <a:latin typeface="Aptos" pitchFamily="34" charset="0"/>
               </a:rPr>
               <a:pPr eaLnBrk="1" hangingPunct="1"/>
-              <a:t>13</a:t>
+              <a:t>12</a:t>
             </a:fld>
             <a:endParaRPr lang="en-US" altLang="ru-RU">
               <a:latin typeface="Aptos" pitchFamily="34" charset="0"/>
@@ -1937,7 +1937,7 @@
                 <a:latin typeface="Aptos" pitchFamily="34" charset="0"/>
               </a:rPr>
               <a:pPr eaLnBrk="1" hangingPunct="1"/>
-              <a:t>14</a:t>
+              <a:t>13</a:t>
             </a:fld>
             <a:endParaRPr lang="en-US" altLang="ru-RU">
               <a:latin typeface="Aptos" pitchFamily="34" charset="0"/>
@@ -2210,7 +2210,7 @@
                 <a:latin typeface="Aptos" pitchFamily="34" charset="0"/>
               </a:rPr>
               <a:pPr eaLnBrk="1" hangingPunct="1"/>
-              <a:t>15</a:t>
+              <a:t>14</a:t>
             </a:fld>
             <a:endParaRPr lang="en-US" altLang="ru-RU">
               <a:latin typeface="Aptos" pitchFamily="34" charset="0"/>
@@ -2483,7 +2483,7 @@
                 <a:latin typeface="Aptos" pitchFamily="34" charset="0"/>
               </a:rPr>
               <a:pPr eaLnBrk="1" hangingPunct="1"/>
-              <a:t>16</a:t>
+              <a:t>15</a:t>
             </a:fld>
             <a:endParaRPr lang="en-US" altLang="ru-RU">
               <a:latin typeface="Aptos" pitchFamily="34" charset="0"/>
@@ -2756,7 +2756,7 @@
                 <a:latin typeface="Aptos" pitchFamily="34" charset="0"/>
               </a:rPr>
               <a:pPr eaLnBrk="1" hangingPunct="1"/>
-              <a:t>17</a:t>
+              <a:t>16</a:t>
             </a:fld>
             <a:endParaRPr lang="en-US" altLang="ru-RU">
               <a:latin typeface="Aptos" pitchFamily="34" charset="0"/>
@@ -3029,7 +3029,7 @@
                 <a:latin typeface="Aptos" pitchFamily="34" charset="0"/>
               </a:rPr>
               <a:pPr eaLnBrk="1" hangingPunct="1"/>
-              <a:t>18</a:t>
+              <a:t>17</a:t>
             </a:fld>
             <a:endParaRPr lang="en-US" altLang="ru-RU">
               <a:latin typeface="Aptos" pitchFamily="34" charset="0"/>
@@ -3302,7 +3302,7 @@
                 <a:latin typeface="Aptos" pitchFamily="34" charset="0"/>
               </a:rPr>
               <a:pPr eaLnBrk="1" hangingPunct="1"/>
-              <a:t>2</a:t>
+              <a:t>1</a:t>
             </a:fld>
             <a:endParaRPr lang="en-US" altLang="ru-RU">
               <a:latin typeface="Aptos" pitchFamily="34" charset="0"/>
@@ -3575,7 +3575,7 @@
                 <a:latin typeface="Aptos" pitchFamily="34" charset="0"/>
               </a:rPr>
               <a:pPr eaLnBrk="1" hangingPunct="1"/>
-              <a:t>3</a:t>
+              <a:t>2</a:t>
             </a:fld>
             <a:endParaRPr lang="en-US" altLang="ru-RU">
               <a:latin typeface="Aptos" pitchFamily="34" charset="0"/>
@@ -3848,7 +3848,7 @@
                 <a:latin typeface="Aptos" pitchFamily="34" charset="0"/>
               </a:rPr>
               <a:pPr eaLnBrk="1" hangingPunct="1"/>
-              <a:t>4</a:t>
+              <a:t>3</a:t>
             </a:fld>
             <a:endParaRPr lang="en-US" altLang="ru-RU">
               <a:latin typeface="Aptos" pitchFamily="34" charset="0"/>
@@ -4121,7 +4121,7 @@
                 <a:latin typeface="Aptos" pitchFamily="34" charset="0"/>
               </a:rPr>
               <a:pPr eaLnBrk="1" hangingPunct="1"/>
-              <a:t>5</a:t>
+              <a:t>4</a:t>
             </a:fld>
             <a:endParaRPr lang="en-US" altLang="ru-RU">
               <a:latin typeface="Aptos" pitchFamily="34" charset="0"/>
@@ -4394,7 +4394,7 @@
                 <a:latin typeface="Aptos" pitchFamily="34" charset="0"/>
               </a:rPr>
               <a:pPr eaLnBrk="1" hangingPunct="1"/>
-              <a:t>6</a:t>
+              <a:t>5</a:t>
             </a:fld>
             <a:endParaRPr lang="en-US" altLang="ru-RU">
               <a:latin typeface="Aptos" pitchFamily="34" charset="0"/>
@@ -4667,7 +4667,7 @@
                 <a:latin typeface="Aptos" pitchFamily="34" charset="0"/>
               </a:rPr>
               <a:pPr eaLnBrk="1" hangingPunct="1"/>
-              <a:t>7</a:t>
+              <a:t>6</a:t>
             </a:fld>
             <a:endParaRPr lang="en-US" altLang="ru-RU">
               <a:latin typeface="Aptos" pitchFamily="34" charset="0"/>
@@ -4940,7 +4940,7 @@
                 <a:latin typeface="Aptos" pitchFamily="34" charset="0"/>
               </a:rPr>
               <a:pPr eaLnBrk="1" hangingPunct="1"/>
-              <a:t>8</a:t>
+              <a:t>7</a:t>
             </a:fld>
             <a:endParaRPr lang="en-US" altLang="ru-RU">
               <a:latin typeface="Aptos" pitchFamily="34" charset="0"/>
@@ -5213,7 +5213,7 @@
                 <a:latin typeface="Aptos" pitchFamily="34" charset="0"/>
               </a:rPr>
               <a:pPr eaLnBrk="1" hangingPunct="1"/>
-              <a:t>9</a:t>
+              <a:t>8</a:t>
             </a:fld>
             <a:endParaRPr lang="en-US" altLang="ru-RU">
               <a:latin typeface="Aptos" pitchFamily="34" charset="0"/>
@@ -5246,6 +5246,55 @@
           <a:chExt cx="0" cy="0"/>
         </a:xfrm>
       </p:grpSpPr>
+      <p:sp>
+        <p:nvSpPr>
+          <p:cNvPr id="2" name="Номер слайда 1">
+            <a:extLst>
+              <a:ext uri="{FF2B5EF4-FFF2-40B4-BE49-F238E27FC236}">
+                <a16:creationId xmlns:a16="http://schemas.microsoft.com/office/drawing/2014/main" id="{24350E10-41CA-D562-80F2-41C9DEFE1301}"/>
+              </a:ext>
+            </a:extLst>
+          </p:cNvPr>
+          <p:cNvSpPr>
+            <a:spLocks noGrp="1"/>
+          </p:cNvSpPr>
+          <p:nvPr>
+            <p:ph type="sldNum" sz="quarter" idx="4"/>
+          </p:nvPr>
+        </p:nvSpPr>
+        <p:spPr>
+          <a:xfrm>
+            <a:off x="4724400" y="6363658"/>
+            <a:ext cx="2743200" cy="365125"/>
+          </a:xfrm>
+          <a:prstGeom prst="rect">
+            <a:avLst/>
+          </a:prstGeom>
+        </p:spPr>
+        <p:txBody>
+          <a:bodyPr vert="horz" lIns="91440" tIns="45720" rIns="91440" bIns="45720" rtlCol="0" anchor="ctr"/>
+          <a:lstStyle>
+            <a:lvl1pPr algn="r">
+              <a:defRPr sz="1200">
+                <a:solidFill>
+                  <a:schemeClr val="tx1">
+                    <a:tint val="82000"/>
+                  </a:schemeClr>
+                </a:solidFill>
+              </a:defRPr>
+            </a:lvl1pPr>
+          </a:lstStyle>
+          <a:p>
+            <a:pPr algn="ctr"/>
+            <a:fld id="{4F3F9462-AD83-4B2E-B677-EE4525D4A98B}" type="slidenum">
+              <a:rPr lang="ru-RU" smtClean="0"/>
+              <a:pPr algn="ctr"/>
+              <a:t>‹#›</a:t>
+            </a:fld>
+            <a:endParaRPr lang="ru-RU" dirty="0"/>
+          </a:p>
+        </p:txBody>
+      </p:sp>
     </p:spTree>
     <p:extLst>
       <p:ext uri="{BB962C8B-B14F-4D97-AF65-F5344CB8AC3E}">
@@ -5284,6 +5333,55 @@
           <a:chExt cx="0" cy="0"/>
         </a:xfrm>
       </p:grpSpPr>
+      <p:sp>
+        <p:nvSpPr>
+          <p:cNvPr id="2" name="Номер слайда 1">
+            <a:extLst>
+              <a:ext uri="{FF2B5EF4-FFF2-40B4-BE49-F238E27FC236}">
+                <a16:creationId xmlns:a16="http://schemas.microsoft.com/office/drawing/2014/main" id="{9E830666-8143-BBC2-1528-638B2C13E4D6}"/>
+              </a:ext>
+            </a:extLst>
+          </p:cNvPr>
+          <p:cNvSpPr>
+            <a:spLocks noGrp="1"/>
+          </p:cNvSpPr>
+          <p:nvPr>
+            <p:ph type="sldNum" sz="quarter" idx="4"/>
+          </p:nvPr>
+        </p:nvSpPr>
+        <p:spPr>
+          <a:xfrm>
+            <a:off x="4724400" y="6363658"/>
+            <a:ext cx="2743200" cy="365125"/>
+          </a:xfrm>
+          <a:prstGeom prst="rect">
+            <a:avLst/>
+          </a:prstGeom>
+        </p:spPr>
+        <p:txBody>
+          <a:bodyPr vert="horz" lIns="91440" tIns="45720" rIns="91440" bIns="45720" rtlCol="0" anchor="ctr"/>
+          <a:lstStyle>
+            <a:lvl1pPr algn="r">
+              <a:defRPr sz="1200">
+                <a:solidFill>
+                  <a:schemeClr val="tx1">
+                    <a:tint val="82000"/>
+                  </a:schemeClr>
+                </a:solidFill>
+              </a:defRPr>
+            </a:lvl1pPr>
+          </a:lstStyle>
+          <a:p>
+            <a:pPr algn="ctr"/>
+            <a:fld id="{4F3F9462-AD83-4B2E-B677-EE4525D4A98B}" type="slidenum">
+              <a:rPr lang="ru-RU" smtClean="0"/>
+              <a:pPr algn="ctr"/>
+              <a:t>‹#›</a:t>
+            </a:fld>
+            <a:endParaRPr lang="ru-RU" dirty="0"/>
+          </a:p>
+        </p:txBody>
+      </p:sp>
     </p:spTree>
     <p:extLst>
       <p:ext uri="{BB962C8B-B14F-4D97-AF65-F5344CB8AC3E}">
@@ -5322,6 +5420,55 @@
           <a:chExt cx="0" cy="0"/>
         </a:xfrm>
       </p:grpSpPr>
+      <p:sp>
+        <p:nvSpPr>
+          <p:cNvPr id="2" name="Номер слайда 1">
+            <a:extLst>
+              <a:ext uri="{FF2B5EF4-FFF2-40B4-BE49-F238E27FC236}">
+                <a16:creationId xmlns:a16="http://schemas.microsoft.com/office/drawing/2014/main" id="{75232343-10DB-D5C9-04DB-17C3C6FF1C45}"/>
+              </a:ext>
+            </a:extLst>
+          </p:cNvPr>
+          <p:cNvSpPr>
+            <a:spLocks noGrp="1"/>
+          </p:cNvSpPr>
+          <p:nvPr>
+            <p:ph type="sldNum" sz="quarter" idx="4"/>
+          </p:nvPr>
+        </p:nvSpPr>
+        <p:spPr>
+          <a:xfrm>
+            <a:off x="4724400" y="6363658"/>
+            <a:ext cx="2743200" cy="365125"/>
+          </a:xfrm>
+          <a:prstGeom prst="rect">
+            <a:avLst/>
+          </a:prstGeom>
+        </p:spPr>
+        <p:txBody>
+          <a:bodyPr vert="horz" lIns="91440" tIns="45720" rIns="91440" bIns="45720" rtlCol="0" anchor="ctr"/>
+          <a:lstStyle>
+            <a:lvl1pPr algn="r">
+              <a:defRPr sz="1200">
+                <a:solidFill>
+                  <a:schemeClr val="tx1">
+                    <a:tint val="82000"/>
+                  </a:schemeClr>
+                </a:solidFill>
+              </a:defRPr>
+            </a:lvl1pPr>
+          </a:lstStyle>
+          <a:p>
+            <a:pPr algn="ctr"/>
+            <a:fld id="{4F3F9462-AD83-4B2E-B677-EE4525D4A98B}" type="slidenum">
+              <a:rPr lang="ru-RU" smtClean="0"/>
+              <a:pPr algn="ctr"/>
+              <a:t>‹#›</a:t>
+            </a:fld>
+            <a:endParaRPr lang="ru-RU" dirty="0"/>
+          </a:p>
+        </p:txBody>
+      </p:sp>
     </p:spTree>
   </p:cSld>
   <p:clrMap bg1="lt1" tx1="dk1" bg2="lt2" tx2="dk2" accent1="accent1" accent2="accent2" accent3="accent3" accent4="accent4" accent5="accent5" accent6="accent6" hlink="hlink" folHlink="folHlink"/>
@@ -5329,7 +5476,7 @@
     <p:sldLayoutId id="2147483665" r:id="rId1"/>
     <p:sldLayoutId id="2147483666" r:id="rId2"/>
   </p:sldLayoutIdLst>
-  <p:hf sldNum="0" hdr="0" ftr="0" dt="0"/>
+  <p:hf hdr="0" ftr="0" dt="0"/>
   <p:txStyles>
     <p:titleStyle>
       <a:lvl1pPr algn="ctr" rtl="0" eaLnBrk="0" fontAlgn="base" hangingPunct="0">
@@ -7272,7 +7419,7 @@
         <p:spPr bwMode="auto">
           <a:xfrm>
             <a:off x="503238" y="785813"/>
-            <a:ext cx="7161212" cy="503237"/>
+            <a:ext cx="2562507" cy="1939274"/>
           </a:xfrm>
           <a:prstGeom prst="rect">
             <a:avLst/>
@@ -7404,7 +7551,7 @@
           <a:p>
             <a:pPr eaLnBrk="1" hangingPunct="1"/>
             <a:r>
-              <a:rPr lang="ru-RU" altLang="ru-RU" sz="2500" b="1">
+              <a:rPr lang="ru-RU" altLang="ru-RU" sz="2500" b="1" dirty="0">
                 <a:solidFill>
                   <a:srgbClr val="17323A"/>
                 </a:solidFill>
@@ -7412,7 +7559,7 @@
               </a:rPr>
               <a:t>ФИЗИЧЕСКАЯ МОДЕЛЬ БАЗЫ ДАННЫХ</a:t>
             </a:r>
-            <a:endParaRPr lang="en-US" altLang="ru-RU" sz="2500"/>
+            <a:endParaRPr lang="en-US" altLang="ru-RU" sz="2500" dirty="0"/>
           </a:p>
         </p:txBody>
       </p:sp>
@@ -7439,8 +7586,8 @@
         </p:blipFill>
         <p:spPr bwMode="auto">
           <a:xfrm>
-            <a:off x="1716088" y="1036638"/>
-            <a:ext cx="9202737" cy="5821362"/>
+            <a:off x="2802189" y="420687"/>
+            <a:ext cx="9067266" cy="5735667"/>
           </a:xfrm>
           <a:prstGeom prst="rect">
             <a:avLst/>
@@ -7470,6 +7617,37 @@
           </a:extLst>
         </p:spPr>
       </p:pic>
+      <p:sp>
+        <p:nvSpPr>
+          <p:cNvPr id="2" name="Номер слайда 1">
+            <a:extLst>
+              <a:ext uri="{FF2B5EF4-FFF2-40B4-BE49-F238E27FC236}">
+                <a16:creationId xmlns:a16="http://schemas.microsoft.com/office/drawing/2014/main" id="{32A8E318-7A2A-F68D-1905-5E1BD661DADB}"/>
+              </a:ext>
+            </a:extLst>
+          </p:cNvPr>
+          <p:cNvSpPr>
+            <a:spLocks noGrp="1"/>
+          </p:cNvSpPr>
+          <p:nvPr>
+            <p:ph type="sldNum" sz="quarter" idx="4"/>
+          </p:nvPr>
+        </p:nvSpPr>
+        <p:spPr/>
+        <p:txBody>
+          <a:bodyPr/>
+          <a:lstStyle/>
+          <a:p>
+            <a:pPr algn="ctr"/>
+            <a:fld id="{4F3F9462-AD83-4B2E-B677-EE4525D4A98B}" type="slidenum">
+              <a:rPr lang="ru-RU" smtClean="0"/>
+              <a:pPr algn="ctr"/>
+              <a:t>9</a:t>
+            </a:fld>
+            <a:endParaRPr lang="ru-RU" dirty="0"/>
+          </a:p>
+        </p:txBody>
+      </p:sp>
     </p:spTree>
   </p:cSld>
   <p:clrMapOvr>
@@ -8566,6 +8744,37 @@
               <a:t>Docker Compose</a:t>
             </a:r>
             <a:endParaRPr lang="en-US" altLang="ru-RU"/>
+          </a:p>
+        </p:txBody>
+      </p:sp>
+      <p:sp>
+        <p:nvSpPr>
+          <p:cNvPr id="2" name="Номер слайда 1">
+            <a:extLst>
+              <a:ext uri="{FF2B5EF4-FFF2-40B4-BE49-F238E27FC236}">
+                <a16:creationId xmlns:a16="http://schemas.microsoft.com/office/drawing/2014/main" id="{F2E50865-7CAA-EAD3-C58A-D70B777F03AD}"/>
+              </a:ext>
+            </a:extLst>
+          </p:cNvPr>
+          <p:cNvSpPr>
+            <a:spLocks noGrp="1"/>
+          </p:cNvSpPr>
+          <p:nvPr>
+            <p:ph type="sldNum" sz="quarter" idx="4"/>
+          </p:nvPr>
+        </p:nvSpPr>
+        <p:spPr/>
+        <p:txBody>
+          <a:bodyPr/>
+          <a:lstStyle/>
+          <a:p>
+            <a:pPr algn="ctr"/>
+            <a:fld id="{4F3F9462-AD83-4B2E-B677-EE4525D4A98B}" type="slidenum">
+              <a:rPr lang="ru-RU" smtClean="0"/>
+              <a:pPr algn="ctr"/>
+              <a:t>10</a:t>
+            </a:fld>
+            <a:endParaRPr lang="ru-RU" dirty="0"/>
           </a:p>
         </p:txBody>
       </p:sp>
@@ -9104,7 +9313,7 @@
         </p:blipFill>
         <p:spPr bwMode="auto">
           <a:xfrm>
-            <a:off x="357188" y="985838"/>
+            <a:off x="701220" y="985838"/>
             <a:ext cx="11185525" cy="5797550"/>
           </a:xfrm>
           <a:prstGeom prst="rect">
@@ -9135,6 +9344,37 @@
           </a:extLst>
         </p:spPr>
       </p:pic>
+      <p:sp>
+        <p:nvSpPr>
+          <p:cNvPr id="3" name="Номер слайда 2">
+            <a:extLst>
+              <a:ext uri="{FF2B5EF4-FFF2-40B4-BE49-F238E27FC236}">
+                <a16:creationId xmlns:a16="http://schemas.microsoft.com/office/drawing/2014/main" id="{BAA4B343-26A1-88DB-1827-FEB341CE852F}"/>
+              </a:ext>
+            </a:extLst>
+          </p:cNvPr>
+          <p:cNvSpPr>
+            <a:spLocks noGrp="1"/>
+          </p:cNvSpPr>
+          <p:nvPr>
+            <p:ph type="sldNum" sz="quarter" idx="4"/>
+          </p:nvPr>
+        </p:nvSpPr>
+        <p:spPr/>
+        <p:txBody>
+          <a:bodyPr/>
+          <a:lstStyle/>
+          <a:p>
+            <a:pPr algn="ctr"/>
+            <a:fld id="{4F3F9462-AD83-4B2E-B677-EE4525D4A98B}" type="slidenum">
+              <a:rPr lang="ru-RU" smtClean="0"/>
+              <a:pPr algn="ctr"/>
+              <a:t>11</a:t>
+            </a:fld>
+            <a:endParaRPr lang="ru-RU" dirty="0"/>
+          </a:p>
+        </p:txBody>
+      </p:sp>
     </p:spTree>
   </p:cSld>
   <p:clrMapOvr>
@@ -9960,6 +10200,37 @@
           </a:ln>
         </p:spPr>
       </p:pic>
+      <p:sp>
+        <p:nvSpPr>
+          <p:cNvPr id="3" name="Номер слайда 2">
+            <a:extLst>
+              <a:ext uri="{FF2B5EF4-FFF2-40B4-BE49-F238E27FC236}">
+                <a16:creationId xmlns:a16="http://schemas.microsoft.com/office/drawing/2014/main" id="{A5483F58-ABF2-EE93-490D-5610716ABBD3}"/>
+              </a:ext>
+            </a:extLst>
+          </p:cNvPr>
+          <p:cNvSpPr>
+            <a:spLocks noGrp="1"/>
+          </p:cNvSpPr>
+          <p:nvPr>
+            <p:ph type="sldNum" sz="quarter" idx="4"/>
+          </p:nvPr>
+        </p:nvSpPr>
+        <p:spPr/>
+        <p:txBody>
+          <a:bodyPr/>
+          <a:lstStyle/>
+          <a:p>
+            <a:pPr algn="ctr"/>
+            <a:fld id="{4F3F9462-AD83-4B2E-B677-EE4525D4A98B}" type="slidenum">
+              <a:rPr lang="ru-RU" smtClean="0"/>
+              <a:pPr algn="ctr"/>
+              <a:t>12</a:t>
+            </a:fld>
+            <a:endParaRPr lang="ru-RU" dirty="0"/>
+          </a:p>
+        </p:txBody>
+      </p:sp>
     </p:spTree>
   </p:cSld>
   <p:clrMapOvr>
@@ -10687,6 +10958,37 @@
               <a:t>Применены оптимизации (квантование весов, пакетная обработка) для работы в реальном времени.</a:t>
             </a:r>
             <a:endParaRPr lang="en-US" altLang="ru-RU"/>
+          </a:p>
+        </p:txBody>
+      </p:sp>
+      <p:sp>
+        <p:nvSpPr>
+          <p:cNvPr id="2" name="Номер слайда 1">
+            <a:extLst>
+              <a:ext uri="{FF2B5EF4-FFF2-40B4-BE49-F238E27FC236}">
+                <a16:creationId xmlns:a16="http://schemas.microsoft.com/office/drawing/2014/main" id="{2CCC8667-F8F9-9C9D-EF0C-08F5538448D2}"/>
+              </a:ext>
+            </a:extLst>
+          </p:cNvPr>
+          <p:cNvSpPr>
+            <a:spLocks noGrp="1"/>
+          </p:cNvSpPr>
+          <p:nvPr>
+            <p:ph type="sldNum" sz="quarter" idx="4"/>
+          </p:nvPr>
+        </p:nvSpPr>
+        <p:spPr/>
+        <p:txBody>
+          <a:bodyPr/>
+          <a:lstStyle/>
+          <a:p>
+            <a:pPr algn="ctr"/>
+            <a:fld id="{4F3F9462-AD83-4B2E-B677-EE4525D4A98B}" type="slidenum">
+              <a:rPr lang="ru-RU" smtClean="0"/>
+              <a:pPr algn="ctr"/>
+              <a:t>13</a:t>
+            </a:fld>
+            <a:endParaRPr lang="ru-RU" dirty="0"/>
           </a:p>
         </p:txBody>
       </p:sp>
@@ -11354,15 +11656,33 @@
               <a:buChar char="•"/>
             </a:pPr>
             <a:r>
-              <a:rPr lang="ru-RU" altLang="ru-RU">
+              <a:rPr lang="ru-RU" altLang="ru-RU" dirty="0">
                 <a:solidFill>
                   <a:srgbClr val="17323A"/>
                 </a:solidFill>
                 <a:cs typeface="Arial" panose="020B0604020202020204" pitchFamily="34" charset="0"/>
               </a:rPr>
-              <a:t>Транскрибированный текст обрабатывается моделью DistilBERT.</a:t>
+              <a:t>Транскрибированный текст обрабатывается моделью </a:t>
             </a:r>
-            <a:endParaRPr lang="en-US" altLang="ru-RU">
+            <a:r>
+              <a:rPr lang="ru-RU" altLang="ru-RU" dirty="0" err="1">
+                <a:solidFill>
+                  <a:srgbClr val="17323A"/>
+                </a:solidFill>
+                <a:cs typeface="Arial" panose="020B0604020202020204" pitchFamily="34" charset="0"/>
+              </a:rPr>
+              <a:t>DistilBERT</a:t>
+            </a:r>
+            <a:r>
+              <a:rPr lang="ru-RU" altLang="ru-RU" dirty="0">
+                <a:solidFill>
+                  <a:srgbClr val="17323A"/>
+                </a:solidFill>
+                <a:cs typeface="Arial" panose="020B0604020202020204" pitchFamily="34" charset="0"/>
+              </a:rPr>
+              <a:t>.</a:t>
+            </a:r>
+            <a:endParaRPr lang="en-US" altLang="ru-RU" dirty="0">
               <a:solidFill>
                 <a:srgbClr val="17323A"/>
               </a:solidFill>
@@ -11381,7 +11701,7 @@
               <a:buChar char="•"/>
             </a:pPr>
             <a:r>
-              <a:rPr lang="ru-RU" altLang="ru-RU">
+              <a:rPr lang="ru-RU" altLang="ru-RU" dirty="0">
                 <a:solidFill>
                   <a:srgbClr val="17323A"/>
                 </a:solidFill>
@@ -11389,7 +11709,7 @@
               </a:rPr>
               <a:t>Определяется тональность высказывания: позитивная, нейтральная или негативная.</a:t>
             </a:r>
-            <a:endParaRPr lang="en-US" altLang="ru-RU">
+            <a:endParaRPr lang="en-US" altLang="ru-RU" dirty="0">
               <a:solidFill>
                 <a:srgbClr val="17323A"/>
               </a:solidFill>
@@ -11408,7 +11728,7 @@
               <a:buChar char="•"/>
             </a:pPr>
             <a:r>
-              <a:rPr lang="ru-RU" altLang="ru-RU">
+              <a:rPr lang="ru-RU" altLang="ru-RU" dirty="0">
                 <a:solidFill>
                   <a:srgbClr val="17323A"/>
                 </a:solidFill>
@@ -11416,7 +11736,38 @@
               </a:rPr>
               <a:t>Используется принцип позднего слияния для объединения результатов всех модальностей.</a:t>
             </a:r>
-            <a:endParaRPr lang="en-US" altLang="ru-RU"/>
+            <a:endParaRPr lang="en-US" altLang="ru-RU" dirty="0"/>
+          </a:p>
+        </p:txBody>
+      </p:sp>
+      <p:sp>
+        <p:nvSpPr>
+          <p:cNvPr id="2" name="Номер слайда 1">
+            <a:extLst>
+              <a:ext uri="{FF2B5EF4-FFF2-40B4-BE49-F238E27FC236}">
+                <a16:creationId xmlns:a16="http://schemas.microsoft.com/office/drawing/2014/main" id="{2C35EBFE-ECEB-2436-345D-8AD2DD0287B5}"/>
+              </a:ext>
+            </a:extLst>
+          </p:cNvPr>
+          <p:cNvSpPr>
+            <a:spLocks noGrp="1"/>
+          </p:cNvSpPr>
+          <p:nvPr>
+            <p:ph type="sldNum" sz="quarter" idx="4"/>
+          </p:nvPr>
+        </p:nvSpPr>
+        <p:spPr/>
+        <p:txBody>
+          <a:bodyPr/>
+          <a:lstStyle/>
+          <a:p>
+            <a:pPr algn="ctr"/>
+            <a:fld id="{4F3F9462-AD83-4B2E-B677-EE4525D4A98B}" type="slidenum">
+              <a:rPr lang="ru-RU" smtClean="0"/>
+              <a:pPr algn="ctr"/>
+              <a:t>14</a:t>
+            </a:fld>
+            <a:endParaRPr lang="ru-RU" dirty="0"/>
           </a:p>
         </p:txBody>
       </p:sp>
@@ -11920,7 +12271,7 @@
           <a:p>
             <a:pPr eaLnBrk="1" hangingPunct="1"/>
             <a:r>
-              <a:rPr lang="ru-RU" altLang="ru-RU" sz="2500" b="1">
+              <a:rPr lang="ru-RU" altLang="ru-RU" sz="2500" b="1" dirty="0">
                 <a:solidFill>
                   <a:srgbClr val="17323A"/>
                 </a:solidFill>
@@ -11928,7 +12279,7 @@
               </a:rPr>
               <a:t>ИНТЕРФЕЙС СИСТЕМЫ</a:t>
             </a:r>
-            <a:endParaRPr lang="en-US" altLang="ru-RU" sz="2500"/>
+            <a:endParaRPr lang="en-US" altLang="ru-RU" sz="2500" dirty="0"/>
           </a:p>
         </p:txBody>
       </p:sp>
@@ -11955,8 +12306,8 @@
         </p:blipFill>
         <p:spPr bwMode="auto">
           <a:xfrm>
-            <a:off x="990600" y="1289050"/>
-            <a:ext cx="10210800" cy="5122863"/>
+            <a:off x="1329168" y="1289050"/>
+            <a:ext cx="9533664" cy="4783137"/>
           </a:xfrm>
           <a:prstGeom prst="rect">
             <a:avLst/>
@@ -11986,6 +12337,37 @@
           </a:extLst>
         </p:spPr>
       </p:pic>
+      <p:sp>
+        <p:nvSpPr>
+          <p:cNvPr id="2" name="Номер слайда 1">
+            <a:extLst>
+              <a:ext uri="{FF2B5EF4-FFF2-40B4-BE49-F238E27FC236}">
+                <a16:creationId xmlns:a16="http://schemas.microsoft.com/office/drawing/2014/main" id="{EF5ABFA6-30C6-CA6A-A37C-3CF647AA6BDF}"/>
+              </a:ext>
+            </a:extLst>
+          </p:cNvPr>
+          <p:cNvSpPr>
+            <a:spLocks noGrp="1"/>
+          </p:cNvSpPr>
+          <p:nvPr>
+            <p:ph type="sldNum" sz="quarter" idx="4"/>
+          </p:nvPr>
+        </p:nvSpPr>
+        <p:spPr/>
+        <p:txBody>
+          <a:bodyPr/>
+          <a:lstStyle/>
+          <a:p>
+            <a:pPr algn="ctr"/>
+            <a:fld id="{4F3F9462-AD83-4B2E-B677-EE4525D4A98B}" type="slidenum">
+              <a:rPr lang="ru-RU" smtClean="0"/>
+              <a:pPr algn="ctr"/>
+              <a:t>15</a:t>
+            </a:fld>
+            <a:endParaRPr lang="ru-RU" dirty="0"/>
+          </a:p>
+        </p:txBody>
+      </p:sp>
     </p:spTree>
   </p:cSld>
   <p:clrMapOvr>
@@ -12494,7 +12876,7 @@
           <a:p>
             <a:pPr algn="r" eaLnBrk="1" hangingPunct="1"/>
             <a:r>
-              <a:rPr lang="en-US" altLang="ru-RU" sz="800">
+              <a:rPr lang="en-US" altLang="ru-RU" sz="800" dirty="0">
                 <a:solidFill>
                   <a:srgbClr val="6A7A80"/>
                 </a:solidFill>
@@ -12502,7 +12884,7 @@
               </a:rPr>
               <a:t>18</a:t>
             </a:r>
-            <a:endParaRPr lang="en-US" altLang="ru-RU" sz="800"/>
+            <a:endParaRPr lang="en-US" altLang="ru-RU" sz="800" dirty="0"/>
           </a:p>
         </p:txBody>
       </p:sp>
@@ -12930,6 +13312,37 @@
               <a:t>Обеспечено соответствие требованиям ФЗ-152</a:t>
             </a:r>
             <a:endParaRPr lang="en-US" altLang="ru-RU"/>
+          </a:p>
+        </p:txBody>
+      </p:sp>
+      <p:sp>
+        <p:nvSpPr>
+          <p:cNvPr id="2" name="Номер слайда 1">
+            <a:extLst>
+              <a:ext uri="{FF2B5EF4-FFF2-40B4-BE49-F238E27FC236}">
+                <a16:creationId xmlns:a16="http://schemas.microsoft.com/office/drawing/2014/main" id="{CFCBDBCC-40FE-6F5C-8095-509E18D80AF5}"/>
+              </a:ext>
+            </a:extLst>
+          </p:cNvPr>
+          <p:cNvSpPr>
+            <a:spLocks noGrp="1"/>
+          </p:cNvSpPr>
+          <p:nvPr>
+            <p:ph type="sldNum" sz="quarter" idx="4"/>
+          </p:nvPr>
+        </p:nvSpPr>
+        <p:spPr/>
+        <p:txBody>
+          <a:bodyPr/>
+          <a:lstStyle/>
+          <a:p>
+            <a:pPr algn="ctr"/>
+            <a:fld id="{4F3F9462-AD83-4B2E-B677-EE4525D4A98B}" type="slidenum">
+              <a:rPr lang="ru-RU" smtClean="0"/>
+              <a:pPr algn="ctr"/>
+              <a:t>16</a:t>
+            </a:fld>
+            <a:endParaRPr lang="ru-RU" dirty="0"/>
           </a:p>
         </p:txBody>
       </p:sp>
@@ -13792,161 +14205,6 @@
       </p:sp>
       <p:sp>
         <p:nvSpPr>
-          <p:cNvPr id="3077" name="Text 3"/>
-          <p:cNvSpPr>
-            <a:spLocks noChangeArrowheads="1"/>
-          </p:cNvSpPr>
-          <p:nvPr/>
-        </p:nvSpPr>
-        <p:spPr bwMode="auto">
-          <a:xfrm>
-            <a:off x="11293475" y="6364288"/>
-            <a:ext cx="501650" cy="165100"/>
-          </a:xfrm>
-          <a:prstGeom prst="rect">
-            <a:avLst/>
-          </a:prstGeom>
-          <a:noFill/>
-          <a:ln>
-            <a:noFill/>
-          </a:ln>
-          <a:extLst>
-            <a:ext uri="{909E8E84-426E-40DD-AFC4-6F175D3DCCD1}">
-              <a14:hiddenFill xmlns:a14="http://schemas.microsoft.com/office/drawing/2010/main">
-                <a:solidFill>
-                  <a:srgbClr val="FFFFFF"/>
-                </a:solidFill>
-              </a14:hiddenFill>
-            </a:ext>
-            <a:ext uri="{91240B29-F687-4F45-9708-019B960494DF}">
-              <a14:hiddenLine xmlns:a14="http://schemas.microsoft.com/office/drawing/2010/main" w="9525">
-                <a:solidFill>
-                  <a:srgbClr val="000000"/>
-                </a:solidFill>
-                <a:miter lim="800000"/>
-                <a:headEnd/>
-                <a:tailEnd/>
-              </a14:hiddenLine>
-            </a:ext>
-          </a:extLst>
-        </p:spPr>
-        <p:txBody>
-          <a:bodyPr lIns="0" tIns="0" rIns="0" bIns="0" anchor="ctr"/>
-          <a:lstStyle>
-            <a:lvl1pPr>
-              <a:defRPr>
-                <a:solidFill>
-                  <a:schemeClr val="tx1"/>
-                </a:solidFill>
-                <a:latin typeface="Arial" panose="020B0604020202020204" pitchFamily="34" charset="0"/>
-              </a:defRPr>
-            </a:lvl1pPr>
-            <a:lvl2pPr marL="742950" indent="-285750">
-              <a:defRPr>
-                <a:solidFill>
-                  <a:schemeClr val="tx1"/>
-                </a:solidFill>
-                <a:latin typeface="Arial" panose="020B0604020202020204" pitchFamily="34" charset="0"/>
-              </a:defRPr>
-            </a:lvl2pPr>
-            <a:lvl3pPr marL="1143000" indent="-228600">
-              <a:defRPr>
-                <a:solidFill>
-                  <a:schemeClr val="tx1"/>
-                </a:solidFill>
-                <a:latin typeface="Arial" panose="020B0604020202020204" pitchFamily="34" charset="0"/>
-              </a:defRPr>
-            </a:lvl3pPr>
-            <a:lvl4pPr marL="1600200" indent="-228600">
-              <a:defRPr>
-                <a:solidFill>
-                  <a:schemeClr val="tx1"/>
-                </a:solidFill>
-                <a:latin typeface="Arial" panose="020B0604020202020204" pitchFamily="34" charset="0"/>
-              </a:defRPr>
-            </a:lvl4pPr>
-            <a:lvl5pPr marL="2057400" indent="-228600">
-              <a:defRPr>
-                <a:solidFill>
-                  <a:schemeClr val="tx1"/>
-                </a:solidFill>
-                <a:latin typeface="Arial" panose="020B0604020202020204" pitchFamily="34" charset="0"/>
-              </a:defRPr>
-            </a:lvl5pPr>
-            <a:lvl6pPr marL="2514600" indent="-228600" eaLnBrk="0" fontAlgn="base" hangingPunct="0">
-              <a:spcBef>
-                <a:spcPct val="0"/>
-              </a:spcBef>
-              <a:spcAft>
-                <a:spcPct val="0"/>
-              </a:spcAft>
-              <a:defRPr>
-                <a:solidFill>
-                  <a:schemeClr val="tx1"/>
-                </a:solidFill>
-                <a:latin typeface="Arial" panose="020B0604020202020204" pitchFamily="34" charset="0"/>
-              </a:defRPr>
-            </a:lvl6pPr>
-            <a:lvl7pPr marL="2971800" indent="-228600" eaLnBrk="0" fontAlgn="base" hangingPunct="0">
-              <a:spcBef>
-                <a:spcPct val="0"/>
-              </a:spcBef>
-              <a:spcAft>
-                <a:spcPct val="0"/>
-              </a:spcAft>
-              <a:defRPr>
-                <a:solidFill>
-                  <a:schemeClr val="tx1"/>
-                </a:solidFill>
-                <a:latin typeface="Arial" panose="020B0604020202020204" pitchFamily="34" charset="0"/>
-              </a:defRPr>
-            </a:lvl7pPr>
-            <a:lvl8pPr marL="3429000" indent="-228600" eaLnBrk="0" fontAlgn="base" hangingPunct="0">
-              <a:spcBef>
-                <a:spcPct val="0"/>
-              </a:spcBef>
-              <a:spcAft>
-                <a:spcPct val="0"/>
-              </a:spcAft>
-              <a:defRPr>
-                <a:solidFill>
-                  <a:schemeClr val="tx1"/>
-                </a:solidFill>
-                <a:latin typeface="Arial" panose="020B0604020202020204" pitchFamily="34" charset="0"/>
-              </a:defRPr>
-            </a:lvl8pPr>
-            <a:lvl9pPr marL="3886200" indent="-228600" eaLnBrk="0" fontAlgn="base" hangingPunct="0">
-              <a:spcBef>
-                <a:spcPct val="0"/>
-              </a:spcBef>
-              <a:spcAft>
-                <a:spcPct val="0"/>
-              </a:spcAft>
-              <a:defRPr>
-                <a:solidFill>
-                  <a:schemeClr val="tx1"/>
-                </a:solidFill>
-                <a:latin typeface="Arial" panose="020B0604020202020204" pitchFamily="34" charset="0"/>
-              </a:defRPr>
-            </a:lvl9pPr>
-          </a:lstStyle>
-          <a:p>
-            <a:pPr algn="r" eaLnBrk="1" hangingPunct="1"/>
-            <a:r>
-              <a:rPr lang="en-US" altLang="ru-RU" sz="800">
-                <a:solidFill>
-                  <a:srgbClr val="6A7A80"/>
-                </a:solidFill>
-                <a:cs typeface="Arial" panose="020B0604020202020204" pitchFamily="34" charset="0"/>
-              </a:rPr>
-              <a:t>03</a:t>
-            </a:r>
-            <a:endParaRPr lang="en-US" altLang="ru-RU" sz="800"/>
-          </a:p>
-        </p:txBody>
-      </p:sp>
-      <p:sp>
-        <p:nvSpPr>
           <p:cNvPr id="3078" name="Text 4"/>
           <p:cNvSpPr>
             <a:spLocks noChangeArrowheads="1"/>
@@ -14366,6 +14624,37 @@
               <a:t>Реализовать и протестировать программный комплекс</a:t>
             </a:r>
             <a:endParaRPr lang="en-US" altLang="ru-RU"/>
+          </a:p>
+        </p:txBody>
+      </p:sp>
+      <p:sp>
+        <p:nvSpPr>
+          <p:cNvPr id="2" name="Номер слайда 1">
+            <a:extLst>
+              <a:ext uri="{FF2B5EF4-FFF2-40B4-BE49-F238E27FC236}">
+                <a16:creationId xmlns:a16="http://schemas.microsoft.com/office/drawing/2014/main" id="{BB27220C-B200-81F1-F3EF-F7021FF3BAD9}"/>
+              </a:ext>
+            </a:extLst>
+          </p:cNvPr>
+          <p:cNvSpPr>
+            <a:spLocks noGrp="1"/>
+          </p:cNvSpPr>
+          <p:nvPr>
+            <p:ph type="sldNum" sz="quarter" idx="4"/>
+          </p:nvPr>
+        </p:nvSpPr>
+        <p:spPr/>
+        <p:txBody>
+          <a:bodyPr/>
+          <a:lstStyle/>
+          <a:p>
+            <a:pPr algn="ctr"/>
+            <a:fld id="{4F3F9462-AD83-4B2E-B677-EE4525D4A98B}" type="slidenum">
+              <a:rPr lang="ru-RU" smtClean="0"/>
+              <a:pPr algn="ctr"/>
+              <a:t>1</a:t>
+            </a:fld>
+            <a:endParaRPr lang="ru-RU" dirty="0"/>
           </a:p>
         </p:txBody>
       </p:sp>
@@ -14736,161 +15025,6 @@
       </p:sp>
       <p:sp>
         <p:nvSpPr>
-          <p:cNvPr id="5125" name="Text 3"/>
-          <p:cNvSpPr>
-            <a:spLocks noChangeArrowheads="1"/>
-          </p:cNvSpPr>
-          <p:nvPr/>
-        </p:nvSpPr>
-        <p:spPr bwMode="auto">
-          <a:xfrm>
-            <a:off x="11293475" y="6364288"/>
-            <a:ext cx="501650" cy="165100"/>
-          </a:xfrm>
-          <a:prstGeom prst="rect">
-            <a:avLst/>
-          </a:prstGeom>
-          <a:noFill/>
-          <a:ln>
-            <a:noFill/>
-          </a:ln>
-          <a:extLst>
-            <a:ext uri="{909E8E84-426E-40DD-AFC4-6F175D3DCCD1}">
-              <a14:hiddenFill xmlns:a14="http://schemas.microsoft.com/office/drawing/2010/main">
-                <a:solidFill>
-                  <a:srgbClr val="FFFFFF"/>
-                </a:solidFill>
-              </a14:hiddenFill>
-            </a:ext>
-            <a:ext uri="{91240B29-F687-4F45-9708-019B960494DF}">
-              <a14:hiddenLine xmlns:a14="http://schemas.microsoft.com/office/drawing/2010/main" w="9525">
-                <a:solidFill>
-                  <a:srgbClr val="000000"/>
-                </a:solidFill>
-                <a:miter lim="800000"/>
-                <a:headEnd/>
-                <a:tailEnd/>
-              </a14:hiddenLine>
-            </a:ext>
-          </a:extLst>
-        </p:spPr>
-        <p:txBody>
-          <a:bodyPr lIns="0" tIns="0" rIns="0" bIns="0" anchor="ctr"/>
-          <a:lstStyle>
-            <a:lvl1pPr>
-              <a:defRPr>
-                <a:solidFill>
-                  <a:schemeClr val="tx1"/>
-                </a:solidFill>
-                <a:latin typeface="Arial" panose="020B0604020202020204" pitchFamily="34" charset="0"/>
-              </a:defRPr>
-            </a:lvl1pPr>
-            <a:lvl2pPr marL="742950" indent="-285750">
-              <a:defRPr>
-                <a:solidFill>
-                  <a:schemeClr val="tx1"/>
-                </a:solidFill>
-                <a:latin typeface="Arial" panose="020B0604020202020204" pitchFamily="34" charset="0"/>
-              </a:defRPr>
-            </a:lvl2pPr>
-            <a:lvl3pPr marL="1143000" indent="-228600">
-              <a:defRPr>
-                <a:solidFill>
-                  <a:schemeClr val="tx1"/>
-                </a:solidFill>
-                <a:latin typeface="Arial" panose="020B0604020202020204" pitchFamily="34" charset="0"/>
-              </a:defRPr>
-            </a:lvl3pPr>
-            <a:lvl4pPr marL="1600200" indent="-228600">
-              <a:defRPr>
-                <a:solidFill>
-                  <a:schemeClr val="tx1"/>
-                </a:solidFill>
-                <a:latin typeface="Arial" panose="020B0604020202020204" pitchFamily="34" charset="0"/>
-              </a:defRPr>
-            </a:lvl4pPr>
-            <a:lvl5pPr marL="2057400" indent="-228600">
-              <a:defRPr>
-                <a:solidFill>
-                  <a:schemeClr val="tx1"/>
-                </a:solidFill>
-                <a:latin typeface="Arial" panose="020B0604020202020204" pitchFamily="34" charset="0"/>
-              </a:defRPr>
-            </a:lvl5pPr>
-            <a:lvl6pPr marL="2514600" indent="-228600" eaLnBrk="0" fontAlgn="base" hangingPunct="0">
-              <a:spcBef>
-                <a:spcPct val="0"/>
-              </a:spcBef>
-              <a:spcAft>
-                <a:spcPct val="0"/>
-              </a:spcAft>
-              <a:defRPr>
-                <a:solidFill>
-                  <a:schemeClr val="tx1"/>
-                </a:solidFill>
-                <a:latin typeface="Arial" panose="020B0604020202020204" pitchFamily="34" charset="0"/>
-              </a:defRPr>
-            </a:lvl6pPr>
-            <a:lvl7pPr marL="2971800" indent="-228600" eaLnBrk="0" fontAlgn="base" hangingPunct="0">
-              <a:spcBef>
-                <a:spcPct val="0"/>
-              </a:spcBef>
-              <a:spcAft>
-                <a:spcPct val="0"/>
-              </a:spcAft>
-              <a:defRPr>
-                <a:solidFill>
-                  <a:schemeClr val="tx1"/>
-                </a:solidFill>
-                <a:latin typeface="Arial" panose="020B0604020202020204" pitchFamily="34" charset="0"/>
-              </a:defRPr>
-            </a:lvl7pPr>
-            <a:lvl8pPr marL="3429000" indent="-228600" eaLnBrk="0" fontAlgn="base" hangingPunct="0">
-              <a:spcBef>
-                <a:spcPct val="0"/>
-              </a:spcBef>
-              <a:spcAft>
-                <a:spcPct val="0"/>
-              </a:spcAft>
-              <a:defRPr>
-                <a:solidFill>
-                  <a:schemeClr val="tx1"/>
-                </a:solidFill>
-                <a:latin typeface="Arial" panose="020B0604020202020204" pitchFamily="34" charset="0"/>
-              </a:defRPr>
-            </a:lvl8pPr>
-            <a:lvl9pPr marL="3886200" indent="-228600" eaLnBrk="0" fontAlgn="base" hangingPunct="0">
-              <a:spcBef>
-                <a:spcPct val="0"/>
-              </a:spcBef>
-              <a:spcAft>
-                <a:spcPct val="0"/>
-              </a:spcAft>
-              <a:defRPr>
-                <a:solidFill>
-                  <a:schemeClr val="tx1"/>
-                </a:solidFill>
-                <a:latin typeface="Arial" panose="020B0604020202020204" pitchFamily="34" charset="0"/>
-              </a:defRPr>
-            </a:lvl9pPr>
-          </a:lstStyle>
-          <a:p>
-            <a:pPr algn="r" eaLnBrk="1" hangingPunct="1"/>
-            <a:r>
-              <a:rPr lang="en-US" altLang="ru-RU" sz="800">
-                <a:solidFill>
-                  <a:srgbClr val="6A7A80"/>
-                </a:solidFill>
-                <a:cs typeface="Arial" panose="020B0604020202020204" pitchFamily="34" charset="0"/>
-              </a:rPr>
-              <a:t>04</a:t>
-            </a:r>
-            <a:endParaRPr lang="en-US" altLang="ru-RU" sz="800"/>
-          </a:p>
-        </p:txBody>
-      </p:sp>
-      <p:sp>
-        <p:nvSpPr>
           <p:cNvPr id="5126" name="Text 4"/>
           <p:cNvSpPr>
             <a:spLocks noChangeArrowheads="1"/>
@@ -15293,6 +15427,37 @@
               <a:t>Важность соответствия требованиям ФЗ-152 о защите персональных данных</a:t>
             </a:r>
             <a:endParaRPr lang="en-US" altLang="ru-RU"/>
+          </a:p>
+        </p:txBody>
+      </p:sp>
+      <p:sp>
+        <p:nvSpPr>
+          <p:cNvPr id="2" name="Номер слайда 1">
+            <a:extLst>
+              <a:ext uri="{FF2B5EF4-FFF2-40B4-BE49-F238E27FC236}">
+                <a16:creationId xmlns:a16="http://schemas.microsoft.com/office/drawing/2014/main" id="{57396C8E-4AF4-6A1F-6E01-544B098B52CE}"/>
+              </a:ext>
+            </a:extLst>
+          </p:cNvPr>
+          <p:cNvSpPr>
+            <a:spLocks noGrp="1"/>
+          </p:cNvSpPr>
+          <p:nvPr>
+            <p:ph type="sldNum" sz="quarter" idx="4"/>
+          </p:nvPr>
+        </p:nvSpPr>
+        <p:spPr/>
+        <p:txBody>
+          <a:bodyPr/>
+          <a:lstStyle/>
+          <a:p>
+            <a:pPr algn="ctr"/>
+            <a:fld id="{4F3F9462-AD83-4B2E-B677-EE4525D4A98B}" type="slidenum">
+              <a:rPr lang="ru-RU" smtClean="0"/>
+              <a:pPr algn="ctr"/>
+              <a:t>2</a:t>
+            </a:fld>
+            <a:endParaRPr lang="ru-RU" dirty="0"/>
           </a:p>
         </p:txBody>
       </p:sp>
@@ -15822,10 +15987,16 @@
           <p:cNvGraphicFramePr>
             <a:graphicFrameLocks noGrp="1"/>
           </p:cNvGraphicFramePr>
-          <p:nvPr/>
+          <p:nvPr>
+            <p:extLst>
+              <p:ext uri="{D42A27DB-BD31-4B8C-83A1-F6EECF244321}">
+                <p14:modId xmlns:p14="http://schemas.microsoft.com/office/powerpoint/2010/main" val="1558595850"/>
+              </p:ext>
+            </p:extLst>
+          </p:nvPr>
         </p:nvGraphicFramePr>
         <p:xfrm>
-          <a:off x="896938" y="1420813"/>
+          <a:off x="885825" y="1289050"/>
           <a:ext cx="10420350" cy="5116513"/>
         </p:xfrm>
         <a:graphic>
@@ -15854,14 +16025,14 @@
                     </a:ext>
                   </a:extLst>
                 </a:gridCol>
-                <a:gridCol w="2084070">
+                <a:gridCol w="1324896">
                   <a:extLst>
                     <a:ext uri="{9D8B030D-6E8A-4147-A177-3AD203B41FA5}">
                       <a16:colId xmlns:a16="http://schemas.microsoft.com/office/drawing/2014/main" val="20003"/>
                     </a:ext>
                   </a:extLst>
                 </a:gridCol>
-                <a:gridCol w="2084070">
+                <a:gridCol w="2843244">
                   <a:extLst>
                     <a:ext uri="{9D8B030D-6E8A-4147-A177-3AD203B41FA5}">
                       <a16:colId xmlns:a16="http://schemas.microsoft.com/office/drawing/2014/main" val="20004"/>
@@ -17205,6 +17376,37 @@
           </a:graphicData>
         </a:graphic>
       </p:graphicFrame>
+      <p:sp>
+        <p:nvSpPr>
+          <p:cNvPr id="3" name="Номер слайда 2">
+            <a:extLst>
+              <a:ext uri="{FF2B5EF4-FFF2-40B4-BE49-F238E27FC236}">
+                <a16:creationId xmlns:a16="http://schemas.microsoft.com/office/drawing/2014/main" id="{1BAAE685-98B6-CBEE-020B-F636A8C23A93}"/>
+              </a:ext>
+            </a:extLst>
+          </p:cNvPr>
+          <p:cNvSpPr>
+            <a:spLocks noGrp="1"/>
+          </p:cNvSpPr>
+          <p:nvPr>
+            <p:ph type="sldNum" sz="quarter" idx="4"/>
+          </p:nvPr>
+        </p:nvSpPr>
+        <p:spPr/>
+        <p:txBody>
+          <a:bodyPr/>
+          <a:lstStyle/>
+          <a:p>
+            <a:pPr algn="ctr"/>
+            <a:fld id="{4F3F9462-AD83-4B2E-B677-EE4525D4A98B}" type="slidenum">
+              <a:rPr lang="ru-RU" smtClean="0"/>
+              <a:pPr algn="ctr"/>
+              <a:t>3</a:t>
+            </a:fld>
+            <a:endParaRPr lang="ru-RU" dirty="0"/>
+          </a:p>
+        </p:txBody>
+      </p:sp>
     </p:spTree>
   </p:cSld>
   <p:clrMapOvr>
@@ -17771,6 +17973,37 @@
           </a:extLst>
         </p:spPr>
       </p:pic>
+      <p:sp>
+        <p:nvSpPr>
+          <p:cNvPr id="2" name="Номер слайда 1">
+            <a:extLst>
+              <a:ext uri="{FF2B5EF4-FFF2-40B4-BE49-F238E27FC236}">
+                <a16:creationId xmlns:a16="http://schemas.microsoft.com/office/drawing/2014/main" id="{25D597A0-332F-C8CA-BDC5-96D73A0607F8}"/>
+              </a:ext>
+            </a:extLst>
+          </p:cNvPr>
+          <p:cNvSpPr>
+            <a:spLocks noGrp="1"/>
+          </p:cNvSpPr>
+          <p:nvPr>
+            <p:ph type="sldNum" sz="quarter" idx="4"/>
+          </p:nvPr>
+        </p:nvSpPr>
+        <p:spPr/>
+        <p:txBody>
+          <a:bodyPr/>
+          <a:lstStyle/>
+          <a:p>
+            <a:pPr algn="ctr"/>
+            <a:fld id="{4F3F9462-AD83-4B2E-B677-EE4525D4A98B}" type="slidenum">
+              <a:rPr lang="ru-RU" smtClean="0"/>
+              <a:pPr algn="ctr"/>
+              <a:t>4</a:t>
+            </a:fld>
+            <a:endParaRPr lang="ru-RU" dirty="0"/>
+          </a:p>
+        </p:txBody>
+      </p:sp>
     </p:spTree>
   </p:cSld>
   <p:clrMapOvr>
@@ -18306,8 +18539,8 @@
         </p:blipFill>
         <p:spPr bwMode="auto">
           <a:xfrm>
-            <a:off x="3709988" y="125413"/>
-            <a:ext cx="8272462" cy="6607175"/>
+            <a:off x="3100387" y="31750"/>
+            <a:ext cx="7944841" cy="6345506"/>
           </a:xfrm>
           <a:prstGeom prst="rect">
             <a:avLst/>
@@ -18337,6 +18570,37 @@
           </a:extLst>
         </p:spPr>
       </p:pic>
+      <p:sp>
+        <p:nvSpPr>
+          <p:cNvPr id="3" name="Номер слайда 2">
+            <a:extLst>
+              <a:ext uri="{FF2B5EF4-FFF2-40B4-BE49-F238E27FC236}">
+                <a16:creationId xmlns:a16="http://schemas.microsoft.com/office/drawing/2014/main" id="{8857BA77-C7C6-DD28-E05B-2C18D78ED689}"/>
+              </a:ext>
+            </a:extLst>
+          </p:cNvPr>
+          <p:cNvSpPr>
+            <a:spLocks noGrp="1"/>
+          </p:cNvSpPr>
+          <p:nvPr>
+            <p:ph type="sldNum" sz="quarter" idx="4"/>
+          </p:nvPr>
+        </p:nvSpPr>
+        <p:spPr/>
+        <p:txBody>
+          <a:bodyPr/>
+          <a:lstStyle/>
+          <a:p>
+            <a:pPr algn="ctr"/>
+            <a:fld id="{4F3F9462-AD83-4B2E-B677-EE4525D4A98B}" type="slidenum">
+              <a:rPr lang="ru-RU" smtClean="0"/>
+              <a:pPr algn="ctr"/>
+              <a:t>5</a:t>
+            </a:fld>
+            <a:endParaRPr lang="ru-RU" dirty="0"/>
+          </a:p>
+        </p:txBody>
+      </p:sp>
     </p:spTree>
   </p:cSld>
   <p:clrMapOvr>
@@ -18903,6 +19167,37 @@
           </a:extLst>
         </p:spPr>
       </p:pic>
+      <p:sp>
+        <p:nvSpPr>
+          <p:cNvPr id="2" name="Номер слайда 1">
+            <a:extLst>
+              <a:ext uri="{FF2B5EF4-FFF2-40B4-BE49-F238E27FC236}">
+                <a16:creationId xmlns:a16="http://schemas.microsoft.com/office/drawing/2014/main" id="{D3653056-0341-39F0-6582-B307AB1FD220}"/>
+              </a:ext>
+            </a:extLst>
+          </p:cNvPr>
+          <p:cNvSpPr>
+            <a:spLocks noGrp="1"/>
+          </p:cNvSpPr>
+          <p:nvPr>
+            <p:ph type="sldNum" sz="quarter" idx="4"/>
+          </p:nvPr>
+        </p:nvSpPr>
+        <p:spPr/>
+        <p:txBody>
+          <a:bodyPr/>
+          <a:lstStyle/>
+          <a:p>
+            <a:pPr algn="ctr"/>
+            <a:fld id="{4F3F9462-AD83-4B2E-B677-EE4525D4A98B}" type="slidenum">
+              <a:rPr lang="ru-RU" smtClean="0"/>
+              <a:pPr algn="ctr"/>
+              <a:t>6</a:t>
+            </a:fld>
+            <a:endParaRPr lang="ru-RU" dirty="0"/>
+          </a:p>
+        </p:txBody>
+      </p:sp>
     </p:spTree>
   </p:cSld>
   <p:clrMapOvr>
@@ -19469,6 +19764,37 @@
           </a:extLst>
         </p:spPr>
       </p:pic>
+      <p:sp>
+        <p:nvSpPr>
+          <p:cNvPr id="2" name="Номер слайда 1">
+            <a:extLst>
+              <a:ext uri="{FF2B5EF4-FFF2-40B4-BE49-F238E27FC236}">
+                <a16:creationId xmlns:a16="http://schemas.microsoft.com/office/drawing/2014/main" id="{29A00DAF-1797-691E-8AD0-AFCD149446CE}"/>
+              </a:ext>
+            </a:extLst>
+          </p:cNvPr>
+          <p:cNvSpPr>
+            <a:spLocks noGrp="1"/>
+          </p:cNvSpPr>
+          <p:nvPr>
+            <p:ph type="sldNum" sz="quarter" idx="4"/>
+          </p:nvPr>
+        </p:nvSpPr>
+        <p:spPr/>
+        <p:txBody>
+          <a:bodyPr/>
+          <a:lstStyle/>
+          <a:p>
+            <a:pPr algn="ctr"/>
+            <a:fld id="{4F3F9462-AD83-4B2E-B677-EE4525D4A98B}" type="slidenum">
+              <a:rPr lang="ru-RU" smtClean="0"/>
+              <a:pPr algn="ctr"/>
+              <a:t>7</a:t>
+            </a:fld>
+            <a:endParaRPr lang="ru-RU" dirty="0"/>
+          </a:p>
+        </p:txBody>
+      </p:sp>
     </p:spTree>
   </p:cSld>
   <p:clrMapOvr>
@@ -20035,6 +20361,37 @@
           </a:extLst>
         </p:spPr>
       </p:pic>
+      <p:sp>
+        <p:nvSpPr>
+          <p:cNvPr id="2" name="Номер слайда 1">
+            <a:extLst>
+              <a:ext uri="{FF2B5EF4-FFF2-40B4-BE49-F238E27FC236}">
+                <a16:creationId xmlns:a16="http://schemas.microsoft.com/office/drawing/2014/main" id="{69A2FD74-4EC3-78CD-1240-F118EFFC72BF}"/>
+              </a:ext>
+            </a:extLst>
+          </p:cNvPr>
+          <p:cNvSpPr>
+            <a:spLocks noGrp="1"/>
+          </p:cNvSpPr>
+          <p:nvPr>
+            <p:ph type="sldNum" sz="quarter" idx="4"/>
+          </p:nvPr>
+        </p:nvSpPr>
+        <p:spPr/>
+        <p:txBody>
+          <a:bodyPr/>
+          <a:lstStyle/>
+          <a:p>
+            <a:pPr algn="ctr"/>
+            <a:fld id="{4F3F9462-AD83-4B2E-B677-EE4525D4A98B}" type="slidenum">
+              <a:rPr lang="ru-RU" smtClean="0"/>
+              <a:pPr algn="ctr"/>
+              <a:t>8</a:t>
+            </a:fld>
+            <a:endParaRPr lang="ru-RU" dirty="0"/>
+          </a:p>
+        </p:txBody>
+      </p:sp>
     </p:spTree>
   </p:cSld>
   <p:clrMapOvr>

--- a/вкр/презентация-по_ВКР_Демьянцев_Виталий_Владиславович_606_22.pptx
+++ b/вкр/презентация-по_ВКР_Демьянцев_Виталий_Владиславович_606_22.pptx
@@ -5275,7 +5275,7 @@
           <a:bodyPr vert="horz" lIns="91440" tIns="45720" rIns="91440" bIns="45720" rtlCol="0" anchor="ctr"/>
           <a:lstStyle>
             <a:lvl1pPr algn="r">
-              <a:defRPr sz="1200">
+              <a:defRPr sz="1400">
                 <a:solidFill>
                   <a:schemeClr val="tx1">
                     <a:tint val="82000"/>
@@ -5362,7 +5362,7 @@
           <a:bodyPr vert="horz" lIns="91440" tIns="45720" rIns="91440" bIns="45720" rtlCol="0" anchor="ctr"/>
           <a:lstStyle>
             <a:lvl1pPr algn="r">
-              <a:defRPr sz="1200">
+              <a:defRPr sz="1400">
                 <a:solidFill>
                   <a:schemeClr val="tx1">
                     <a:tint val="82000"/>
@@ -5449,7 +5449,7 @@
           <a:bodyPr vert="horz" lIns="91440" tIns="45720" rIns="91440" bIns="45720" rtlCol="0" anchor="ctr"/>
           <a:lstStyle>
             <a:lvl1pPr algn="r">
-              <a:defRPr sz="1200">
+              <a:defRPr sz="1400">
                 <a:solidFill>
                   <a:schemeClr val="tx1">
                     <a:tint val="82000"/>
